--- a/atolye_icerik/sunumlar/04_iz_a_unity_cli_lab.pptx
+++ b/atolye_icerik/sunumlar/04_iz_a_unity_cli_lab.pptx
@@ -1709,7 +1709,7 @@
                 <a:ea typeface="Arial" pitchFamily="34" charset="-122"/>
                 <a:cs typeface="Arial" pitchFamily="34" charset="-120"/>
               </a:rPr>
-              <a:t>İZ A · 13:30 – 16:45 · MÜHENDİSLİK + DEVOPS</a:t>
+              <a:t>İZ A · 13:30 – 15:00 · MÜHENDİSLİK + DEVOPS</a:t>
             </a:r>
             <a:endParaRPr lang="en-US" sz="1300" dirty="0"/>
           </a:p>
@@ -2481,7 +2481,7 @@
                 <a:ea typeface="Arial" pitchFamily="34" charset="-122"/>
                 <a:cs typeface="Arial" pitchFamily="34" charset="-120"/>
               </a:rPr>
-              <a:t>Bir hata→düzeltme döngüsü kanıtıyla + workshop_validate komutunuz + iOS build raporu. T3 gözleminizi metrik şablonuna yazın.</a:t>
+              <a:t>Bir hata→düzeltme döngüsü kanıtı + workshop_validate komutunuz; iOS build raporu gösterimden. T3 gözleminizi metrik şablonuna yazın.</a:t>
             </a:r>
             <a:endParaRPr lang="en-US" sz="1250" dirty="0"/>
           </a:p>
@@ -2748,7 +2748,7 @@
                 <a:ea typeface="Arial" pitchFamily="34" charset="-122"/>
                 <a:cs typeface="Arial" pitchFamily="34" charset="-120"/>
               </a:rPr>
-              <a:t>Her alıştırma: 5 dk eğitmen gösterimi + 5–10 dk sizin uygulamanız + terminalden doğrulama.</a:t>
+              <a:t>Sıkıştırılmış akış: Ex01, Ex02, Ex06 ve Ex07 uygulamalı; Ex03–Ex05 ve Ex09 hızlı eğitmen gösterimi; Ex08 atölye sonrası için brifing.</a:t>
             </a:r>
             <a:endParaRPr lang="en-US" sz="1300" dirty="0"/>
           </a:p>
@@ -5793,7 +5793,7 @@
                 <a:ea typeface="Arial" pitchFamily="34" charset="-122"/>
                 <a:cs typeface="Arial" pitchFamily="34" charset="-120"/>
               </a:rPr>
-              <a:t>Zamanlama: 15 dk ortam kontrolü + 9 × 15 dk alıştırma + 15 dk ara ≈ 180 dakika.</a:t>
+              <a:t>Zamanlama: 10 dk ortam kontrolü + 4 uygulamalı çekirdek alıştırma + gösterimler ≈ 90 dakika.</a:t>
             </a:r>
             <a:endParaRPr lang="en-US" sz="1200" dirty="0"/>
           </a:p>
@@ -6552,7 +6552,7 @@
                 <a:ea typeface="Arial" pitchFamily="34" charset="-122"/>
                 <a:cs typeface="Arial" pitchFamily="34" charset="-120"/>
               </a:rPr>
-              <a:t>BLOK 1 · 13:45 – 14:30</a:t>
+              <a:t>BLOK 1 · 13:40 – 14:15</a:t>
             </a:r>
             <a:endParaRPr lang="en-US" sz="1100" dirty="0"/>
           </a:p>
@@ -7011,7 +7011,7 @@
                 <a:ea typeface="Arial" pitchFamily="34" charset="-122"/>
                 <a:cs typeface="Arial" pitchFamily="34" charset="-120"/>
               </a:rPr>
-              <a:t>Ajana coin prefab'ı ve 8'li halkayı yaptırıyor, kalan altını eval ile terminalden sayıyorsunuz — hata avının temel kası.</a:t>
+              <a:t>Gösterim: coin prefab'ı ve 8'li halka; kalan altın eval ile terminalden sayılır — hata avının temel kası.</a:t>
             </a:r>
             <a:endParaRPr lang="en-US" sz="1200" dirty="0"/>
           </a:p>
@@ -7121,7 +7121,7 @@
                 <a:ea typeface="Arial" pitchFamily="34" charset="-122"/>
                 <a:cs typeface="Arial" pitchFamily="34" charset="-120"/>
               </a:rPr>
-              <a:t>BLOK 2 · 14:30 – 15:00</a:t>
+              <a:t>GÖSTERİM · 14:15 – 14:25</a:t>
             </a:r>
             <a:endParaRPr lang="en-US" sz="1100" dirty="0"/>
           </a:p>
@@ -7501,7 +7501,7 @@
                 <a:ea typeface="Arial" pitchFamily="34" charset="-122"/>
                 <a:cs typeface="Arial" pitchFamily="34" charset="-120"/>
               </a:rPr>
-              <a:t>15:00 – 15:15 ara — sonrasında sahneler QA kaydıyla açılıyor.</a:t>
+              <a:t>Gösterimin ardından sahne QA kaydıyla açılıyor — Ex06 sizin elinizde.</a:t>
             </a:r>
             <a:endParaRPr lang="en-US" sz="1200" dirty="0"/>
           </a:p>
@@ -7611,7 +7611,7 @@
                 <a:ea typeface="Arial" pitchFamily="34" charset="-122"/>
                 <a:cs typeface="Arial" pitchFamily="34" charset="-120"/>
               </a:rPr>
-              <a:t>EX06 · 15:15 – 15:30</a:t>
+              <a:t>EX06 · 14:25 – 14:45</a:t>
             </a:r>
             <a:endParaRPr lang="en-US" sz="1100" dirty="0"/>
           </a:p>
@@ -8129,7 +8129,7 @@
                 <a:ea typeface="Arial" pitchFamily="34" charset="-122"/>
                 <a:cs typeface="Arial" pitchFamily="34" charset="-120"/>
               </a:rPr>
-              <a:t>EX07 – EX08 · 15:30 – 16:00</a:t>
+              <a:t>EX07 – EX08 · 14:45 – 14:55</a:t>
             </a:r>
             <a:endParaRPr lang="en-US" sz="1100" dirty="0"/>
           </a:p>
@@ -8468,7 +8468,7 @@
                 <a:ea typeface="Arial" pitchFamily="34" charset="-122"/>
                 <a:cs typeface="Arial" pitchFamily="34" charset="-120"/>
               </a:rPr>
-              <a:t>Yalnızca kabul kriterleri: mıknatıs güçlendirmesi, 5 saniye, yarıçap ~4. İstemi siz yazıyorsunuz, planı siz sorguluyorsunuz, kanıtı siz istiyorsunuz. Doğrulayıcınız hâlâ yeşil kalmalı.</a:t>
+              <a:t>Bugün yalnızca brifing: kabul kriterleri sizde (mıknatıs, 5 saniye, yarıçap ~4) — bu alıştırmayı atölye sonrası yalnız başınıza tamamlayın. Doğrulayıcınız yeşil kalmalı.</a:t>
             </a:r>
             <a:endParaRPr lang="en-US" sz="1150" dirty="0"/>
           </a:p>
@@ -8578,7 +8578,7 @@
                 <a:ea typeface="Arial" pitchFamily="34" charset="-122"/>
                 <a:cs typeface="Arial" pitchFamily="34" charset="-120"/>
               </a:rPr>
-              <a:t>EX09 · 16:00 – 16:30</a:t>
+              <a:t>EX09 · GÖSTERİM · 14:55 – 15:00</a:t>
             </a:r>
             <a:endParaRPr lang="en-US" sz="1100" dirty="0"/>
           </a:p>
